--- a/docs/Clg 2nd review.pptx
+++ b/docs/Clg 2nd review.pptx
@@ -210,7 +210,7 @@
           <a:p>
             <a:fld id="{C1BED7E8-5420-4F73-BA32-34A7030FE7D8}" type="datetimeFigureOut">
               <a:rPr lang="en-US" smtClean="0"/>
-              <a:t>4/13/2026</a:t>
+              <a:t>4/18/2026</a:t>
             </a:fld>
             <a:endParaRPr lang="en-US"/>
           </a:p>
@@ -1764,7 +1764,7 @@
           <a:p>
             <a:fld id="{C198EE3F-C531-4F47-81BE-EB7857D8F039}" type="datetimeFigureOut">
               <a:rPr lang="en-US" smtClean="0"/>
-              <a:t>4/13/2026</a:t>
+              <a:t>4/18/2026</a:t>
             </a:fld>
             <a:endParaRPr lang="en-US"/>
           </a:p>
@@ -1962,7 +1962,7 @@
           <a:p>
             <a:fld id="{C198EE3F-C531-4F47-81BE-EB7857D8F039}" type="datetimeFigureOut">
               <a:rPr lang="en-US" smtClean="0"/>
-              <a:t>4/13/2026</a:t>
+              <a:t>4/18/2026</a:t>
             </a:fld>
             <a:endParaRPr lang="en-US"/>
           </a:p>
@@ -2170,7 +2170,7 @@
           <a:p>
             <a:fld id="{C198EE3F-C531-4F47-81BE-EB7857D8F039}" type="datetimeFigureOut">
               <a:rPr lang="en-US" smtClean="0"/>
-              <a:t>4/13/2026</a:t>
+              <a:t>4/18/2026</a:t>
             </a:fld>
             <a:endParaRPr lang="en-US"/>
           </a:p>
@@ -2368,7 +2368,7 @@
           <a:p>
             <a:fld id="{C198EE3F-C531-4F47-81BE-EB7857D8F039}" type="datetimeFigureOut">
               <a:rPr lang="en-US" smtClean="0"/>
-              <a:t>4/13/2026</a:t>
+              <a:t>4/18/2026</a:t>
             </a:fld>
             <a:endParaRPr lang="en-US"/>
           </a:p>
@@ -2643,7 +2643,7 @@
           <a:p>
             <a:fld id="{C198EE3F-C531-4F47-81BE-EB7857D8F039}" type="datetimeFigureOut">
               <a:rPr lang="en-US" smtClean="0"/>
-              <a:t>4/13/2026</a:t>
+              <a:t>4/18/2026</a:t>
             </a:fld>
             <a:endParaRPr lang="en-US"/>
           </a:p>
@@ -2908,7 +2908,7 @@
           <a:p>
             <a:fld id="{C198EE3F-C531-4F47-81BE-EB7857D8F039}" type="datetimeFigureOut">
               <a:rPr lang="en-US" smtClean="0"/>
-              <a:t>4/13/2026</a:t>
+              <a:t>4/18/2026</a:t>
             </a:fld>
             <a:endParaRPr lang="en-US"/>
           </a:p>
@@ -3320,7 +3320,7 @@
           <a:p>
             <a:fld id="{C198EE3F-C531-4F47-81BE-EB7857D8F039}" type="datetimeFigureOut">
               <a:rPr lang="en-US" smtClean="0"/>
-              <a:t>4/13/2026</a:t>
+              <a:t>4/18/2026</a:t>
             </a:fld>
             <a:endParaRPr lang="en-US"/>
           </a:p>
@@ -3461,7 +3461,7 @@
           <a:p>
             <a:fld id="{C198EE3F-C531-4F47-81BE-EB7857D8F039}" type="datetimeFigureOut">
               <a:rPr lang="en-US" smtClean="0"/>
-              <a:t>4/13/2026</a:t>
+              <a:t>4/18/2026</a:t>
             </a:fld>
             <a:endParaRPr lang="en-US"/>
           </a:p>
@@ -3574,7 +3574,7 @@
           <a:p>
             <a:fld id="{C198EE3F-C531-4F47-81BE-EB7857D8F039}" type="datetimeFigureOut">
               <a:rPr lang="en-US" smtClean="0"/>
-              <a:t>4/13/2026</a:t>
+              <a:t>4/18/2026</a:t>
             </a:fld>
             <a:endParaRPr lang="en-US"/>
           </a:p>
@@ -3885,7 +3885,7 @@
           <a:p>
             <a:fld id="{C198EE3F-C531-4F47-81BE-EB7857D8F039}" type="datetimeFigureOut">
               <a:rPr lang="en-US" smtClean="0"/>
-              <a:t>4/13/2026</a:t>
+              <a:t>4/18/2026</a:t>
             </a:fld>
             <a:endParaRPr lang="en-US"/>
           </a:p>
@@ -4173,7 +4173,7 @@
           <a:p>
             <a:fld id="{C198EE3F-C531-4F47-81BE-EB7857D8F039}" type="datetimeFigureOut">
               <a:rPr lang="en-US" smtClean="0"/>
-              <a:t>4/13/2026</a:t>
+              <a:t>4/18/2026</a:t>
             </a:fld>
             <a:endParaRPr lang="en-US"/>
           </a:p>
@@ -4414,7 +4414,7 @@
           <a:p>
             <a:fld id="{C198EE3F-C531-4F47-81BE-EB7857D8F039}" type="datetimeFigureOut">
               <a:rPr lang="en-US" smtClean="0"/>
-              <a:t>4/13/2026</a:t>
+              <a:t>4/18/2026</a:t>
             </a:fld>
             <a:endParaRPr lang="en-US"/>
           </a:p>
@@ -5027,21 +5027,35 @@
                 <a:latin typeface="Times New Roman" panose="02020603050405020304" pitchFamily="18" charset="0"/>
                 <a:cs typeface="Times New Roman" panose="02020603050405020304" pitchFamily="18" charset="0"/>
               </a:rPr>
-              <a:t>Date:- 11</a:t>
-            </a:r>
-            <a:r>
-              <a:rPr lang="en-US" sz="2600" baseline="30000" dirty="0">
+              <a:t>Date</a:t>
+            </a:r>
+            <a:r>
+              <a:rPr lang="en-US" sz="2600">
+                <a:latin typeface="Times New Roman" panose="02020603050405020304" pitchFamily="18" charset="0"/>
+                <a:cs typeface="Times New Roman" panose="02020603050405020304" pitchFamily="18" charset="0"/>
+              </a:rPr>
+              <a:t>:- 18</a:t>
+            </a:r>
+            <a:r>
+              <a:rPr lang="en-US" sz="2600" baseline="30000">
                 <a:latin typeface="Times New Roman" panose="02020603050405020304" pitchFamily="18" charset="0"/>
                 <a:cs typeface="Times New Roman" panose="02020603050405020304" pitchFamily="18" charset="0"/>
               </a:rPr>
               <a:t>th</a:t>
             </a:r>
             <a:r>
+              <a:rPr lang="en-US" sz="2600">
+                <a:latin typeface="Times New Roman" panose="02020603050405020304" pitchFamily="18" charset="0"/>
+                <a:cs typeface="Times New Roman" panose="02020603050405020304" pitchFamily="18" charset="0"/>
+              </a:rPr>
+              <a:t> </a:t>
+            </a:r>
+            <a:r>
               <a:rPr lang="en-US" sz="2600" dirty="0">
                 <a:latin typeface="Times New Roman" panose="02020603050405020304" pitchFamily="18" charset="0"/>
                 <a:cs typeface="Times New Roman" panose="02020603050405020304" pitchFamily="18" charset="0"/>
               </a:rPr>
-              <a:t> April 2026</a:t>
+              <a:t>April 2026</a:t>
             </a:r>
           </a:p>
           <a:p>
@@ -5413,7 +5427,7 @@
         <p:spPr>
           <a:xfrm>
             <a:off x="265471" y="792624"/>
-            <a:ext cx="11661058" cy="4093428"/>
+            <a:ext cx="11661058" cy="3785652"/>
           </a:xfrm>
           <a:prstGeom prst="rect">
             <a:avLst/>
@@ -5435,7 +5449,7 @@
                 <a:latin typeface="Times New Roman" panose="02020603050405020304" pitchFamily="18" charset="0"/>
                 <a:cs typeface="Times New Roman" panose="02020603050405020304" pitchFamily="18" charset="0"/>
               </a:rPr>
-              <a:t>Reduces unexpected breakdowns by predicting potential failures in advance and enabling timely preventive maintenance actions.</a:t>
+              <a:t>Reduces unexpected breakdowns and maintenance costs by predicting failures in advance and shifting from reactive to planned, condition-based maintenance. </a:t>
             </a:r>
           </a:p>
           <a:p>
@@ -5443,12 +5457,22 @@
               <a:buFont typeface="Wingdings" panose="05000000000000000000" pitchFamily="2" charset="2"/>
               <a:buChar char="Ø"/>
             </a:pPr>
+            <a:endParaRPr lang="en-US" sz="2000" dirty="0">
+              <a:latin typeface="Times New Roman" panose="02020603050405020304" pitchFamily="18" charset="0"/>
+              <a:cs typeface="Times New Roman" panose="02020603050405020304" pitchFamily="18" charset="0"/>
+            </a:endParaRPr>
+          </a:p>
+          <a:p>
+            <a:pPr marL="342900" indent="-342900" algn="just">
+              <a:buFont typeface="Wingdings" panose="05000000000000000000" pitchFamily="2" charset="2"/>
+              <a:buChar char="Ø"/>
+            </a:pPr>
             <a:r>
               <a:rPr lang="en-US" sz="2000" dirty="0">
                 <a:latin typeface="Times New Roman" panose="02020603050405020304" pitchFamily="18" charset="0"/>
                 <a:cs typeface="Times New Roman" panose="02020603050405020304" pitchFamily="18" charset="0"/>
               </a:rPr>
-              <a:t>Minimizes maintenance costs by shifting from reactive repairs to planned maintenance based on equipment condition.</a:t>
+              <a:t>Increases equipment lifespan and operational efficiency through continuous monitoring and early detection of performance degradation. </a:t>
             </a:r>
           </a:p>
           <a:p>
@@ -5456,12 +5480,22 @@
               <a:buFont typeface="Wingdings" panose="05000000000000000000" pitchFamily="2" charset="2"/>
               <a:buChar char="Ø"/>
             </a:pPr>
+            <a:endParaRPr lang="en-US" sz="2000" dirty="0">
+              <a:latin typeface="Times New Roman" panose="02020603050405020304" pitchFamily="18" charset="0"/>
+              <a:cs typeface="Times New Roman" panose="02020603050405020304" pitchFamily="18" charset="0"/>
+            </a:endParaRPr>
+          </a:p>
+          <a:p>
+            <a:pPr marL="342900" indent="-342900" algn="just">
+              <a:buFont typeface="Wingdings" panose="05000000000000000000" pitchFamily="2" charset="2"/>
+              <a:buChar char="Ø"/>
+            </a:pPr>
             <a:r>
               <a:rPr lang="en-US" sz="2000" dirty="0">
                 <a:latin typeface="Times New Roman" panose="02020603050405020304" pitchFamily="18" charset="0"/>
                 <a:cs typeface="Times New Roman" panose="02020603050405020304" pitchFamily="18" charset="0"/>
               </a:rPr>
-              <a:t>Increases equipment lifespan through continuous monitoring and early detection of performance degradation.</a:t>
+              <a:t>Provides real-time monitoring of equipment health parameters, enabling faster decision-making and better operational control. </a:t>
             </a:r>
           </a:p>
           <a:p>
@@ -5469,12 +5503,22 @@
               <a:buFont typeface="Wingdings" panose="05000000000000000000" pitchFamily="2" charset="2"/>
               <a:buChar char="Ø"/>
             </a:pPr>
+            <a:endParaRPr lang="en-US" sz="2000" dirty="0">
+              <a:latin typeface="Times New Roman" panose="02020603050405020304" pitchFamily="18" charset="0"/>
+              <a:cs typeface="Times New Roman" panose="02020603050405020304" pitchFamily="18" charset="0"/>
+            </a:endParaRPr>
+          </a:p>
+          <a:p>
+            <a:pPr marL="342900" indent="-342900" algn="just">
+              <a:buFont typeface="Wingdings" panose="05000000000000000000" pitchFamily="2" charset="2"/>
+              <a:buChar char="Ø"/>
+            </a:pPr>
             <a:r>
               <a:rPr lang="en-US" sz="2000" dirty="0">
                 <a:latin typeface="Times New Roman" panose="02020603050405020304" pitchFamily="18" charset="0"/>
                 <a:cs typeface="Times New Roman" panose="02020603050405020304" pitchFamily="18" charset="0"/>
               </a:rPr>
-              <a:t>Provides real-time monitoring of equipment health parameters for faster decision-making and operational control.</a:t>
+              <a:t>Ensures cloud scalability and secure data storage with controlled access, allowing efficient handling of large data volumes and protection of sensitive information. </a:t>
             </a:r>
           </a:p>
           <a:p>
@@ -5482,39 +5526,10 @@
               <a:buFont typeface="Wingdings" panose="05000000000000000000" pitchFamily="2" charset="2"/>
               <a:buChar char="Ø"/>
             </a:pPr>
-            <a:r>
-              <a:rPr lang="en-US" sz="2000" dirty="0">
-                <a:latin typeface="Times New Roman" panose="02020603050405020304" pitchFamily="18" charset="0"/>
-                <a:cs typeface="Times New Roman" panose="02020603050405020304" pitchFamily="18" charset="0"/>
-              </a:rPr>
-              <a:t>Ensures cloud scalability, allowing the system to handle increasing data volume and multiple equipment units efficiently.</a:t>
-            </a:r>
-          </a:p>
-          <a:p>
-            <a:pPr marL="342900" indent="-342900" algn="just">
-              <a:buFont typeface="Wingdings" panose="05000000000000000000" pitchFamily="2" charset="2"/>
-              <a:buChar char="Ø"/>
-            </a:pPr>
-            <a:r>
-              <a:rPr lang="en-US" sz="2000" dirty="0">
-                <a:latin typeface="Times New Roman" panose="02020603050405020304" pitchFamily="18" charset="0"/>
-                <a:cs typeface="Times New Roman" panose="02020603050405020304" pitchFamily="18" charset="0"/>
-              </a:rPr>
-              <a:t>Offers secure data storage with authentication and controlled access to protect sensitive operational information.</a:t>
-            </a:r>
-          </a:p>
-          <a:p>
-            <a:pPr marL="342900" indent="-342900" algn="just">
-              <a:buFont typeface="Wingdings" panose="05000000000000000000" pitchFamily="2" charset="2"/>
-              <a:buChar char="Ø"/>
-            </a:pPr>
-            <a:r>
-              <a:rPr lang="en-US" sz="2000" dirty="0">
-                <a:latin typeface="Times New Roman" panose="02020603050405020304" pitchFamily="18" charset="0"/>
-                <a:cs typeface="Times New Roman" panose="02020603050405020304" pitchFamily="18" charset="0"/>
-              </a:rPr>
-              <a:t>Improves overall operational efficiency by optimizing maintenance scheduling and reducing production downtime.</a:t>
-            </a:r>
+            <a:endParaRPr lang="en-US" sz="2000" dirty="0">
+              <a:latin typeface="Times New Roman" panose="02020603050405020304" pitchFamily="18" charset="0"/>
+              <a:cs typeface="Times New Roman" panose="02020603050405020304" pitchFamily="18" charset="0"/>
+            </a:endParaRPr>
           </a:p>
         </p:txBody>
       </p:sp>
@@ -5604,7 +5619,7 @@
         <p:spPr>
           <a:xfrm>
             <a:off x="265471" y="792624"/>
-            <a:ext cx="11661058" cy="3170099"/>
+            <a:ext cx="11661058" cy="3477875"/>
           </a:xfrm>
           <a:prstGeom prst="rect">
             <a:avLst/>
@@ -5626,7 +5641,7 @@
                 <a:latin typeface="Times New Roman" panose="02020603050405020304" pitchFamily="18" charset="0"/>
                 <a:cs typeface="Times New Roman" panose="02020603050405020304" pitchFamily="18" charset="0"/>
               </a:rPr>
-              <a:t>Requires accurate historical data to train the machine learning model effectively and ensure reliable failure predictions.</a:t>
+              <a:t>Requires high-quality and sufficient historical data to train machine learning models effectively, as poor or imbalanced data can reduce prediction accuracy.</a:t>
             </a:r>
           </a:p>
           <a:p>
@@ -5634,12 +5649,22 @@
               <a:buFont typeface="Wingdings" panose="05000000000000000000" pitchFamily="2" charset="2"/>
               <a:buChar char="Ø"/>
             </a:pPr>
+            <a:endParaRPr lang="en-US" sz="2000" dirty="0">
+              <a:latin typeface="Times New Roman" panose="02020603050405020304" pitchFamily="18" charset="0"/>
+              <a:cs typeface="Times New Roman" panose="02020603050405020304" pitchFamily="18" charset="0"/>
+            </a:endParaRPr>
+          </a:p>
+          <a:p>
+            <a:pPr marL="342900" indent="-342900" algn="just">
+              <a:buFont typeface="Wingdings" panose="05000000000000000000" pitchFamily="2" charset="2"/>
+              <a:buChar char="Ø"/>
+            </a:pPr>
             <a:r>
               <a:rPr lang="en-US" sz="2000" dirty="0">
                 <a:latin typeface="Times New Roman" panose="02020603050405020304" pitchFamily="18" charset="0"/>
                 <a:cs typeface="Times New Roman" panose="02020603050405020304" pitchFamily="18" charset="0"/>
               </a:rPr>
-              <a:t>Initial setup cost is high, as it involves cloud infrastructure configuration, system development, and model training.</a:t>
+              <a:t>Involves high initial setup costs due to cloud infrastructure configuration, system development, and model training.</a:t>
             </a:r>
           </a:p>
           <a:p>
@@ -5647,12 +5672,22 @@
               <a:buFont typeface="Wingdings" panose="05000000000000000000" pitchFamily="2" charset="2"/>
               <a:buChar char="Ø"/>
             </a:pPr>
+            <a:endParaRPr lang="en-US" sz="2000" dirty="0">
+              <a:latin typeface="Times New Roman" panose="02020603050405020304" pitchFamily="18" charset="0"/>
+              <a:cs typeface="Times New Roman" panose="02020603050405020304" pitchFamily="18" charset="0"/>
+            </a:endParaRPr>
+          </a:p>
+          <a:p>
+            <a:pPr marL="342900" indent="-342900" algn="just">
+              <a:buFont typeface="Wingdings" panose="05000000000000000000" pitchFamily="2" charset="2"/>
+              <a:buChar char="Ø"/>
+            </a:pPr>
             <a:r>
               <a:rPr lang="en-US" sz="2000" dirty="0">
                 <a:latin typeface="Times New Roman" panose="02020603050405020304" pitchFamily="18" charset="0"/>
                 <a:cs typeface="Times New Roman" panose="02020603050405020304" pitchFamily="18" charset="0"/>
               </a:rPr>
-              <a:t>Model accuracy depends on training data quality, and poor or imbalanced data can reduce prediction performance.</a:t>
+              <a:t>Depends on stable internet connectivity for continuous cloud access, real-time monitoring, and data synchronization.</a:t>
             </a:r>
           </a:p>
           <a:p>
@@ -5660,25 +5695,22 @@
               <a:buFont typeface="Wingdings" panose="05000000000000000000" pitchFamily="2" charset="2"/>
               <a:buChar char="Ø"/>
             </a:pPr>
+            <a:endParaRPr lang="en-US" sz="2000" dirty="0">
+              <a:latin typeface="Times New Roman" panose="02020603050405020304" pitchFamily="18" charset="0"/>
+              <a:cs typeface="Times New Roman" panose="02020603050405020304" pitchFamily="18" charset="0"/>
+            </a:endParaRPr>
+          </a:p>
+          <a:p>
+            <a:pPr marL="342900" indent="-342900" algn="just">
+              <a:buFont typeface="Wingdings" panose="05000000000000000000" pitchFamily="2" charset="2"/>
+              <a:buChar char="Ø"/>
+            </a:pPr>
             <a:r>
               <a:rPr lang="en-US" sz="2000" dirty="0">
                 <a:latin typeface="Times New Roman" panose="02020603050405020304" pitchFamily="18" charset="0"/>
                 <a:cs typeface="Times New Roman" panose="02020603050405020304" pitchFamily="18" charset="0"/>
               </a:rPr>
-              <a:t>Requires stable internet connectivity for continuous cloud access, real-time monitoring, and data synchronization.</a:t>
-            </a:r>
-          </a:p>
-          <a:p>
-            <a:pPr marL="342900" indent="-342900" algn="just">
-              <a:buFont typeface="Wingdings" panose="05000000000000000000" pitchFamily="2" charset="2"/>
-              <a:buChar char="Ø"/>
-            </a:pPr>
-            <a:r>
-              <a:rPr lang="en-US" sz="2000" dirty="0">
-                <a:latin typeface="Times New Roman" panose="02020603050405020304" pitchFamily="18" charset="0"/>
-                <a:cs typeface="Times New Roman" panose="02020603050405020304" pitchFamily="18" charset="0"/>
-              </a:rPr>
-              <a:t>Needs periodic model retraining to adapt to new failure patterns, changing equipment behavior, and updated operational conditions.</a:t>
+              <a:t>Needs periodic model retraining to adapt to changing equipment behavior, new failure patterns, and updated operational conditions.</a:t>
             </a:r>
           </a:p>
         </p:txBody>
@@ -5769,7 +5801,7 @@
         <p:spPr>
           <a:xfrm>
             <a:off x="265471" y="792624"/>
-            <a:ext cx="11661058" cy="3170099"/>
+            <a:ext cx="11661058" cy="2554545"/>
           </a:xfrm>
           <a:prstGeom prst="rect">
             <a:avLst/>
@@ -5791,20 +5823,7 @@
                 <a:latin typeface="Times New Roman" panose="02020603050405020304" pitchFamily="18" charset="0"/>
                 <a:cs typeface="Times New Roman" panose="02020603050405020304" pitchFamily="18" charset="0"/>
               </a:rPr>
-              <a:t>The Proactive Equipment Care system presents an intelligent and scalable approach to predictive maintenance by integrating cloud computing, data analytics, and deep learning technologies. By continuously collecting and analyzing equipment data, the system enables early detection of potential failures and supports proactive maintenance planning. The implementation of an LSTM-based model enhances prediction accuracy, allowing industries to receive alerts 24–48 hours before possible breakdowns.</a:t>
-            </a:r>
-          </a:p>
-          <a:p>
-            <a:pPr marL="342900" indent="-342900" algn="just">
-              <a:buFont typeface="Wingdings" panose="05000000000000000000" pitchFamily="2" charset="2"/>
-              <a:buChar char="Ø"/>
-            </a:pPr>
-            <a:r>
-              <a:rPr lang="en-US" sz="2000" dirty="0">
-                <a:latin typeface="Times New Roman" panose="02020603050405020304" pitchFamily="18" charset="0"/>
-                <a:cs typeface="Times New Roman" panose="02020603050405020304" pitchFamily="18" charset="0"/>
-              </a:rPr>
-              <a:t>Overall, this project successfully demonstrates how cloud-integrated analytics can transform traditional reactive maintenance into a data-driven, predictive maintenance strategy. By reducing downtime, lowering maintenance costs, and improving equipment reliability, the system contributes to increased productivity, operational efficiency, and long-term industrial sustainability.</a:t>
+              <a:t>The Proactive Equipment Care system provides a scalable predictive maintenance solution by integrating cloud computing, data analytics, and deep learning to continuously monitor and analyze equipment data.</a:t>
             </a:r>
           </a:p>
           <a:p>
@@ -5816,6 +5835,42 @@
               <a:latin typeface="Times New Roman" panose="02020603050405020304" pitchFamily="18" charset="0"/>
               <a:cs typeface="Times New Roman" panose="02020603050405020304" pitchFamily="18" charset="0"/>
             </a:endParaRPr>
+          </a:p>
+          <a:p>
+            <a:pPr marL="342900" indent="-342900" algn="just">
+              <a:buFont typeface="Wingdings" panose="05000000000000000000" pitchFamily="2" charset="2"/>
+              <a:buChar char="Ø"/>
+            </a:pPr>
+            <a:r>
+              <a:rPr lang="en-US" sz="2000" dirty="0">
+                <a:latin typeface="Times New Roman" panose="02020603050405020304" pitchFamily="18" charset="0"/>
+                <a:cs typeface="Times New Roman" panose="02020603050405020304" pitchFamily="18" charset="0"/>
+              </a:rPr>
+              <a:t>The use of an LSTM-based model improves prediction accuracy and enables early failure detection, allowing industries to receive alerts 24–48 hours in advance for proactive maintenance.</a:t>
+            </a:r>
+          </a:p>
+          <a:p>
+            <a:pPr marL="342900" indent="-342900" algn="just">
+              <a:buFont typeface="Wingdings" panose="05000000000000000000" pitchFamily="2" charset="2"/>
+              <a:buChar char="Ø"/>
+            </a:pPr>
+            <a:endParaRPr lang="en-US" sz="2000" dirty="0">
+              <a:latin typeface="Times New Roman" panose="02020603050405020304" pitchFamily="18" charset="0"/>
+              <a:cs typeface="Times New Roman" panose="02020603050405020304" pitchFamily="18" charset="0"/>
+            </a:endParaRPr>
+          </a:p>
+          <a:p>
+            <a:pPr marL="342900" indent="-342900" algn="just">
+              <a:buFont typeface="Wingdings" panose="05000000000000000000" pitchFamily="2" charset="2"/>
+              <a:buChar char="Ø"/>
+            </a:pPr>
+            <a:r>
+              <a:rPr lang="en-US" sz="2000" dirty="0">
+                <a:latin typeface="Times New Roman" panose="02020603050405020304" pitchFamily="18" charset="0"/>
+                <a:cs typeface="Times New Roman" panose="02020603050405020304" pitchFamily="18" charset="0"/>
+              </a:rPr>
+              <a:t>The system transforms traditional reactive maintenance into a data-driven approach, reducing downtime and costs while improving equipment reliability, productivity, and overall operational efficiency.</a:t>
+            </a:r>
           </a:p>
         </p:txBody>
       </p:sp>
@@ -6221,7 +6276,7 @@
         <p:spPr>
           <a:xfrm>
             <a:off x="265471" y="792624"/>
-            <a:ext cx="11661058" cy="2554545"/>
+            <a:ext cx="11661058" cy="3785652"/>
           </a:xfrm>
           <a:prstGeom prst="rect">
             <a:avLst/>
@@ -6252,6 +6307,17 @@
               <a:buFont typeface="Wingdings" panose="05000000000000000000" pitchFamily="2" charset="2"/>
               <a:buChar char="Ø"/>
             </a:pPr>
+            <a:endParaRPr lang="en-US" sz="2000" dirty="0">
+              <a:latin typeface="Times New Roman" panose="02020603050405020304" pitchFamily="18" charset="0"/>
+              <a:ea typeface="Tahoma" panose="020B0604030504040204" pitchFamily="34" charset="0"/>
+              <a:cs typeface="Times New Roman" panose="02020603050405020304" pitchFamily="18" charset="0"/>
+            </a:endParaRPr>
+          </a:p>
+          <a:p>
+            <a:pPr marL="342900" indent="-342900" algn="just">
+              <a:buFont typeface="Wingdings" panose="05000000000000000000" pitchFamily="2" charset="2"/>
+              <a:buChar char="Ø"/>
+            </a:pPr>
             <a:r>
               <a:rPr lang="en-US" sz="2000" dirty="0">
                 <a:latin typeface="Times New Roman" panose="02020603050405020304" pitchFamily="18" charset="0"/>
@@ -6266,6 +6332,17 @@
               <a:buFont typeface="Wingdings" panose="05000000000000000000" pitchFamily="2" charset="2"/>
               <a:buChar char="Ø"/>
             </a:pPr>
+            <a:endParaRPr lang="en-US" sz="2000" dirty="0">
+              <a:latin typeface="Times New Roman" panose="02020603050405020304" pitchFamily="18" charset="0"/>
+              <a:ea typeface="Tahoma" panose="020B0604030504040204" pitchFamily="34" charset="0"/>
+              <a:cs typeface="Times New Roman" panose="02020603050405020304" pitchFamily="18" charset="0"/>
+            </a:endParaRPr>
+          </a:p>
+          <a:p>
+            <a:pPr marL="342900" indent="-342900" algn="just">
+              <a:buFont typeface="Wingdings" panose="05000000000000000000" pitchFamily="2" charset="2"/>
+              <a:buChar char="Ø"/>
+            </a:pPr>
             <a:r>
               <a:rPr lang="en-US" sz="2000" dirty="0">
                 <a:latin typeface="Times New Roman" panose="02020603050405020304" pitchFamily="18" charset="0"/>
@@ -6280,6 +6357,17 @@
               <a:buFont typeface="Wingdings" panose="05000000000000000000" pitchFamily="2" charset="2"/>
               <a:buChar char="Ø"/>
             </a:pPr>
+            <a:endParaRPr lang="en-US" sz="2000" dirty="0">
+              <a:latin typeface="Times New Roman" panose="02020603050405020304" pitchFamily="18" charset="0"/>
+              <a:ea typeface="Tahoma" panose="020B0604030504040204" pitchFamily="34" charset="0"/>
+              <a:cs typeface="Times New Roman" panose="02020603050405020304" pitchFamily="18" charset="0"/>
+            </a:endParaRPr>
+          </a:p>
+          <a:p>
+            <a:pPr marL="342900" indent="-342900" algn="just">
+              <a:buFont typeface="Wingdings" panose="05000000000000000000" pitchFamily="2" charset="2"/>
+              <a:buChar char="Ø"/>
+            </a:pPr>
             <a:r>
               <a:rPr lang="en-US" sz="2000" dirty="0">
                 <a:latin typeface="Times New Roman" panose="02020603050405020304" pitchFamily="18" charset="0"/>
@@ -6288,6 +6376,17 @@
               </a:rPr>
               <a:t>The ML model predicts potential failures, enabling preventive maintenance. </a:t>
             </a:r>
+          </a:p>
+          <a:p>
+            <a:pPr marL="342900" indent="-342900" algn="just">
+              <a:buFont typeface="Wingdings" panose="05000000000000000000" pitchFamily="2" charset="2"/>
+              <a:buChar char="Ø"/>
+            </a:pPr>
+            <a:endParaRPr lang="en-US" sz="2000" dirty="0">
+              <a:latin typeface="Times New Roman" panose="02020603050405020304" pitchFamily="18" charset="0"/>
+              <a:ea typeface="Tahoma" panose="020B0604030504040204" pitchFamily="34" charset="0"/>
+              <a:cs typeface="Times New Roman" panose="02020603050405020304" pitchFamily="18" charset="0"/>
+            </a:endParaRPr>
           </a:p>
           <a:p>
             <a:pPr marL="342900" indent="-342900" algn="just">
@@ -6385,7 +6484,7 @@
         <p:spPr>
           <a:xfrm>
             <a:off x="265471" y="792624"/>
-            <a:ext cx="11661058" cy="3785652"/>
+            <a:ext cx="11661058" cy="3477875"/>
           </a:xfrm>
           <a:prstGeom prst="rect">
             <a:avLst/>
@@ -6420,7 +6519,7 @@
                 <a:latin typeface="Times New Roman" panose="02020603050405020304" pitchFamily="18" charset="0"/>
                 <a:cs typeface="Times New Roman" panose="02020603050405020304" pitchFamily="18" charset="0"/>
               </a:rPr>
-              <a:t>Unexpected equipment failures cause production loss, downtime, and high maintenance costs in many industries.</a:t>
+              <a:t>Unexpected equipment failures lead to production loss, increased downtime, high maintenance costs, and potential safety risks in industrial environments. </a:t>
             </a:r>
           </a:p>
           <a:p>
@@ -6428,80 +6527,53 @@
               <a:buFont typeface="Wingdings" panose="05000000000000000000" pitchFamily="2" charset="2"/>
               <a:buChar char="ü"/>
             </a:pPr>
+            <a:endParaRPr lang="en-US" sz="2000" dirty="0">
+              <a:latin typeface="Times New Roman" panose="02020603050405020304" pitchFamily="18" charset="0"/>
+              <a:cs typeface="Times New Roman" panose="02020603050405020304" pitchFamily="18" charset="0"/>
+            </a:endParaRPr>
+          </a:p>
+          <a:p>
+            <a:pPr marL="342900" indent="-342900" algn="just">
+              <a:buFont typeface="Wingdings" panose="05000000000000000000" pitchFamily="2" charset="2"/>
+              <a:buChar char="ü"/>
+            </a:pPr>
             <a:r>
               <a:rPr lang="en-US" sz="2000" dirty="0">
                 <a:latin typeface="Times New Roman" panose="02020603050405020304" pitchFamily="18" charset="0"/>
                 <a:cs typeface="Times New Roman" panose="02020603050405020304" pitchFamily="18" charset="0"/>
               </a:rPr>
-              <a:t>Traditional maintenance happens after equipment fails. This causes production </a:t>
-            </a:r>
-            <a:r>
-              <a:rPr lang="en-US" sz="2000" dirty="0" err="1">
-                <a:latin typeface="Times New Roman" panose="02020603050405020304" pitchFamily="18" charset="0"/>
-                <a:cs typeface="Times New Roman" panose="02020603050405020304" pitchFamily="18" charset="0"/>
-              </a:rPr>
-              <a:t>loss,repair</a:t>
-            </a:r>
+              <a:t>Traditional reactive maintenance approaches address issues only after failure, resulting in inefficient operations, higher repair costs, and poor maintenance planning. </a:t>
+            </a:r>
+          </a:p>
+          <a:p>
+            <a:pPr marL="342900" indent="-342900" algn="just">
+              <a:buFont typeface="Wingdings" panose="05000000000000000000" pitchFamily="2" charset="2"/>
+              <a:buChar char="ü"/>
+            </a:pPr>
+            <a:endParaRPr lang="en-US" sz="2000" dirty="0">
+              <a:latin typeface="Times New Roman" panose="02020603050405020304" pitchFamily="18" charset="0"/>
+              <a:cs typeface="Times New Roman" panose="02020603050405020304" pitchFamily="18" charset="0"/>
+            </a:endParaRPr>
+          </a:p>
+          <a:p>
+            <a:pPr marL="342900" indent="-342900" algn="just">
+              <a:buFont typeface="Wingdings" panose="05000000000000000000" pitchFamily="2" charset="2"/>
+              <a:buChar char="ü"/>
+            </a:pPr>
             <a:r>
               <a:rPr lang="en-US" sz="2000" dirty="0">
                 <a:latin typeface="Times New Roman" panose="02020603050405020304" pitchFamily="18" charset="0"/>
                 <a:cs typeface="Times New Roman" panose="02020603050405020304" pitchFamily="18" charset="0"/>
               </a:rPr>
-              <a:t> </a:t>
-            </a:r>
-            <a:r>
-              <a:rPr lang="en-US" sz="2000" dirty="0" err="1">
-                <a:latin typeface="Times New Roman" panose="02020603050405020304" pitchFamily="18" charset="0"/>
-                <a:cs typeface="Times New Roman" panose="02020603050405020304" pitchFamily="18" charset="0"/>
-              </a:rPr>
-              <a:t>cost,and</a:t>
-            </a:r>
-            <a:r>
-              <a:rPr lang="en-US" sz="2000" dirty="0">
-                <a:latin typeface="Times New Roman" panose="02020603050405020304" pitchFamily="18" charset="0"/>
-                <a:cs typeface="Times New Roman" panose="02020603050405020304" pitchFamily="18" charset="0"/>
-              </a:rPr>
-              <a:t> safety risk.</a:t>
-            </a:r>
-          </a:p>
-          <a:p>
-            <a:pPr marL="342900" indent="-342900" algn="just">
-              <a:buFont typeface="Wingdings" panose="05000000000000000000" pitchFamily="2" charset="2"/>
-              <a:buChar char="ü"/>
-            </a:pPr>
-            <a:r>
-              <a:rPr lang="en-US" sz="2000" dirty="0">
-                <a:latin typeface="Times New Roman" panose="02020603050405020304" pitchFamily="18" charset="0"/>
-                <a:cs typeface="Times New Roman" panose="02020603050405020304" pitchFamily="18" charset="0"/>
-              </a:rPr>
-              <a:t>A smart system that uses analytics and cloud computing to continuously monitor equipment health and anticipate failures early is required.</a:t>
-            </a:r>
-          </a:p>
-          <a:p>
-            <a:pPr marL="342900" indent="-342900" algn="just">
-              <a:buFont typeface="Wingdings" panose="05000000000000000000" pitchFamily="2" charset="2"/>
-              <a:buChar char="ü"/>
-            </a:pPr>
-            <a:r>
-              <a:rPr lang="en-US" sz="2000" dirty="0">
-                <a:latin typeface="Times New Roman" panose="02020603050405020304" pitchFamily="18" charset="0"/>
-                <a:cs typeface="Times New Roman" panose="02020603050405020304" pitchFamily="18" charset="0"/>
-              </a:rPr>
-              <a:t>Without intelligent analytics, industries struggle to optimize maintenance planning, resource allocation, and spare part management.</a:t>
-            </a:r>
-          </a:p>
-          <a:p>
-            <a:pPr marL="342900" indent="-342900" algn="just">
-              <a:buFont typeface="Wingdings" panose="05000000000000000000" pitchFamily="2" charset="2"/>
-              <a:buChar char="ü"/>
-            </a:pPr>
-            <a:r>
-              <a:rPr lang="en-US" sz="2000" dirty="0">
-                <a:latin typeface="Times New Roman" panose="02020603050405020304" pitchFamily="18" charset="0"/>
-                <a:cs typeface="Times New Roman" panose="02020603050405020304" pitchFamily="18" charset="0"/>
-              </a:rPr>
-              <a:t>The absence of centralized cloud-based data storage limits historical data analysis and prevents data-driven maintenance decision-making.</a:t>
-            </a:r>
+              <a:t>There is a need for a cloud-based smart system with analytics to enable continuous monitoring, centralized data storage, and data-driven decision-making for optimized maintenance and resource management. </a:t>
+            </a:r>
+          </a:p>
+          <a:p>
+            <a:pPr algn="just"/>
+            <a:endParaRPr lang="en-US" sz="2000" dirty="0">
+              <a:latin typeface="Times New Roman" panose="02020603050405020304" pitchFamily="18" charset="0"/>
+              <a:cs typeface="Times New Roman" panose="02020603050405020304" pitchFamily="18" charset="0"/>
+            </a:endParaRPr>
           </a:p>
         </p:txBody>
       </p:sp>
@@ -6519,7 +6591,7 @@
         </p:nvSpPr>
         <p:spPr>
           <a:xfrm>
-            <a:off x="265471" y="4807974"/>
+            <a:off x="265471" y="4054189"/>
             <a:ext cx="11661058" cy="1015663"/>
           </a:xfrm>
           <a:prstGeom prst="rect">
@@ -6637,7 +6709,7 @@
         <p:spPr>
           <a:xfrm>
             <a:off x="265471" y="792624"/>
-            <a:ext cx="11661058" cy="4401205"/>
+            <a:ext cx="11661058" cy="3785652"/>
           </a:xfrm>
           <a:prstGeom prst="rect">
             <a:avLst/>
@@ -6659,7 +6731,7 @@
                 <a:latin typeface="Times New Roman" panose="02020603050405020304" pitchFamily="18" charset="0"/>
                 <a:cs typeface="Times New Roman" panose="02020603050405020304" pitchFamily="18" charset="0"/>
               </a:rPr>
-              <a:t>To develop a cloud-based predictive maintenance system that enables continuous monitoring and intelligent analysis of equipment performance from any location.</a:t>
+              <a:t>To develop a cloud-based predictive maintenance system for continuous remote monitoring, secure data storage, and intelligent analysis of equipment performance.</a:t>
             </a:r>
           </a:p>
           <a:p>
@@ -6667,12 +6739,22 @@
               <a:buFont typeface="Wingdings" panose="05000000000000000000" pitchFamily="2" charset="2"/>
               <a:buChar char="Ø"/>
             </a:pPr>
+            <a:endParaRPr lang="en-US" sz="2000" dirty="0">
+              <a:latin typeface="Times New Roman" panose="02020603050405020304" pitchFamily="18" charset="0"/>
+              <a:cs typeface="Times New Roman" panose="02020603050405020304" pitchFamily="18" charset="0"/>
+            </a:endParaRPr>
+          </a:p>
+          <a:p>
+            <a:pPr marL="342900" indent="-342900" algn="just">
+              <a:buFont typeface="Wingdings" panose="05000000000000000000" pitchFamily="2" charset="2"/>
+              <a:buChar char="Ø"/>
+            </a:pPr>
             <a:r>
               <a:rPr lang="en-US" sz="2000" dirty="0">
                 <a:latin typeface="Times New Roman" panose="02020603050405020304" pitchFamily="18" charset="0"/>
                 <a:cs typeface="Times New Roman" panose="02020603050405020304" pitchFamily="18" charset="0"/>
               </a:rPr>
-              <a:t>To collect and process motor equipment data such as temperature, vibration, and load parameters to assess operational health accurately.</a:t>
+              <a:t>To collect and process key motor data (temperature, vibration, load) and apply machine learning algorithms to accurately assess equipment health and predict potential failures.</a:t>
             </a:r>
           </a:p>
           <a:p>
@@ -6680,12 +6762,22 @@
               <a:buFont typeface="Wingdings" panose="05000000000000000000" pitchFamily="2" charset="2"/>
               <a:buChar char="Ø"/>
             </a:pPr>
+            <a:endParaRPr lang="en-US" sz="2000" dirty="0">
+              <a:latin typeface="Times New Roman" panose="02020603050405020304" pitchFamily="18" charset="0"/>
+              <a:cs typeface="Times New Roman" panose="02020603050405020304" pitchFamily="18" charset="0"/>
+            </a:endParaRPr>
+          </a:p>
+          <a:p>
+            <a:pPr marL="342900" indent="-342900" algn="just">
+              <a:buFont typeface="Wingdings" panose="05000000000000000000" pitchFamily="2" charset="2"/>
+              <a:buChar char="Ø"/>
+            </a:pPr>
             <a:r>
               <a:rPr lang="en-US" sz="2000" dirty="0">
                 <a:latin typeface="Times New Roman" panose="02020603050405020304" pitchFamily="18" charset="0"/>
                 <a:cs typeface="Times New Roman" panose="02020603050405020304" pitchFamily="18" charset="0"/>
               </a:rPr>
-              <a:t>To apply Machine Learning algorithms for failure prediction in order to identify early warning signs and prevent unexpected equipment breakdowns.</a:t>
+              <a:t>To provide a real-time dashboard that visualizes equipment status, predictions, and historical trends for effective monitoring and decision-making.</a:t>
             </a:r>
           </a:p>
           <a:p>
@@ -6693,12 +6785,22 @@
               <a:buFont typeface="Wingdings" panose="05000000000000000000" pitchFamily="2" charset="2"/>
               <a:buChar char="Ø"/>
             </a:pPr>
+            <a:endParaRPr lang="en-US" sz="2000" dirty="0">
+              <a:latin typeface="Times New Roman" panose="02020603050405020304" pitchFamily="18" charset="0"/>
+              <a:cs typeface="Times New Roman" panose="02020603050405020304" pitchFamily="18" charset="0"/>
+            </a:endParaRPr>
+          </a:p>
+          <a:p>
+            <a:pPr marL="342900" indent="-342900" algn="just">
+              <a:buFont typeface="Wingdings" panose="05000000000000000000" pitchFamily="2" charset="2"/>
+              <a:buChar char="Ø"/>
+            </a:pPr>
             <a:r>
               <a:rPr lang="en-US" sz="2000" dirty="0">
                 <a:latin typeface="Times New Roman" panose="02020603050405020304" pitchFamily="18" charset="0"/>
                 <a:cs typeface="Times New Roman" panose="02020603050405020304" pitchFamily="18" charset="0"/>
               </a:rPr>
-              <a:t>To provide a real-time monitoring dashboard that visually represents equipment status, predictions, and historical trends for better decision-making.</a:t>
+              <a:t>To reduce downtime and maintenance costs by enabling proactive maintenance through advanced analytics and early fault detection. </a:t>
             </a:r>
           </a:p>
           <a:p>
@@ -6706,39 +6808,10 @@
               <a:buFont typeface="Wingdings" panose="05000000000000000000" pitchFamily="2" charset="2"/>
               <a:buChar char="Ø"/>
             </a:pPr>
-            <a:r>
-              <a:rPr lang="en-US" sz="2000" dirty="0">
-                <a:latin typeface="Times New Roman" panose="02020603050405020304" pitchFamily="18" charset="0"/>
-                <a:cs typeface="Times New Roman" panose="02020603050405020304" pitchFamily="18" charset="0"/>
-              </a:rPr>
-              <a:t>To reduce downtime and maintenance costs by shifting from reactive maintenance to a proactive and predictive approach.</a:t>
-            </a:r>
-          </a:p>
-          <a:p>
-            <a:pPr marL="342900" indent="-342900" algn="just">
-              <a:buFont typeface="Wingdings" panose="05000000000000000000" pitchFamily="2" charset="2"/>
-              <a:buChar char="Ø"/>
-            </a:pPr>
-            <a:r>
-              <a:rPr lang="en-US" sz="2000" dirty="0">
-                <a:latin typeface="Times New Roman" panose="02020603050405020304" pitchFamily="18" charset="0"/>
-                <a:cs typeface="Times New Roman" panose="02020603050405020304" pitchFamily="18" charset="0"/>
-              </a:rPr>
-              <a:t>To securely store logs and system data ensuring data integrity, confidentiality, and easy retrieval for future analysis.</a:t>
-            </a:r>
-          </a:p>
-          <a:p>
-            <a:pPr marL="342900" indent="-342900" algn="just">
-              <a:buFont typeface="Wingdings" panose="05000000000000000000" pitchFamily="2" charset="2"/>
-              <a:buChar char="Ø"/>
-            </a:pPr>
-            <a:r>
-              <a:rPr lang="en-US" sz="2000" dirty="0">
-                <a:latin typeface="Times New Roman" panose="02020603050405020304" pitchFamily="18" charset="0"/>
-                <a:cs typeface="Times New Roman" panose="02020603050405020304" pitchFamily="18" charset="0"/>
-              </a:rPr>
-              <a:t>To analyze equipment data using advanced analytics models to extract meaningful insights and improve maintenance planning.</a:t>
-            </a:r>
+            <a:endParaRPr lang="en-US" sz="2000" dirty="0">
+              <a:latin typeface="Times New Roman" panose="02020603050405020304" pitchFamily="18" charset="0"/>
+              <a:cs typeface="Times New Roman" panose="02020603050405020304" pitchFamily="18" charset="0"/>
+            </a:endParaRPr>
           </a:p>
         </p:txBody>
       </p:sp>
@@ -6828,7 +6901,7 @@
         <p:spPr>
           <a:xfrm>
             <a:off x="265471" y="792624"/>
-            <a:ext cx="11661058" cy="5016758"/>
+            <a:ext cx="11661058" cy="4093428"/>
           </a:xfrm>
           <a:prstGeom prst="rect">
             <a:avLst/>
@@ -6863,7 +6936,7 @@
                 <a:latin typeface="Times New Roman" panose="02020603050405020304" pitchFamily="18" charset="0"/>
                 <a:cs typeface="Times New Roman" panose="02020603050405020304" pitchFamily="18" charset="0"/>
               </a:rPr>
-              <a:t>To track the condition of equipment in real time by continuously monitoring operational parameters such as temperature, vibration, and load.</a:t>
+              <a:t>To continuously monitor equipment condition in real time by tracking parameters such as temperature, vibration, and load for accurate performance assessment. </a:t>
             </a:r>
           </a:p>
           <a:p>
@@ -6871,12 +6944,22 @@
               <a:buFont typeface="Wingdings" panose="05000000000000000000" pitchFamily="2" charset="2"/>
               <a:buChar char="ü"/>
             </a:pPr>
+            <a:endParaRPr lang="en-US" sz="2000" dirty="0">
+              <a:latin typeface="Times New Roman" panose="02020603050405020304" pitchFamily="18" charset="0"/>
+              <a:cs typeface="Times New Roman" panose="02020603050405020304" pitchFamily="18" charset="0"/>
+            </a:endParaRPr>
+          </a:p>
+          <a:p>
+            <a:pPr marL="342900" indent="-342900" algn="just">
+              <a:buFont typeface="Wingdings" panose="05000000000000000000" pitchFamily="2" charset="2"/>
+              <a:buChar char="ü"/>
+            </a:pPr>
             <a:r>
               <a:rPr lang="en-US" sz="2000" dirty="0">
                 <a:latin typeface="Times New Roman" panose="02020603050405020304" pitchFamily="18" charset="0"/>
                 <a:cs typeface="Times New Roman" panose="02020603050405020304" pitchFamily="18" charset="0"/>
               </a:rPr>
-              <a:t>To predict equipment failures before they occur using data-driven models that analyze patterns and detect early warning signs.</a:t>
+              <a:t>To predict potential equipment failures using data-driven and machine learning models that identify patterns and early warning signs. </a:t>
             </a:r>
           </a:p>
           <a:p>
@@ -6884,20 +6967,29 @@
               <a:buFont typeface="Wingdings" panose="05000000000000000000" pitchFamily="2" charset="2"/>
               <a:buChar char="ü"/>
             </a:pPr>
+            <a:endParaRPr lang="en-US" sz="2000" dirty="0">
+              <a:latin typeface="Times New Roman" panose="02020603050405020304" pitchFamily="18" charset="0"/>
+              <a:cs typeface="Times New Roman" panose="02020603050405020304" pitchFamily="18" charset="0"/>
+            </a:endParaRPr>
+          </a:p>
+          <a:p>
+            <a:pPr marL="342900" indent="-342900" algn="just">
+              <a:buFont typeface="Wingdings" panose="05000000000000000000" pitchFamily="2" charset="2"/>
+              <a:buChar char="ü"/>
+            </a:pPr>
             <a:r>
               <a:rPr lang="en-US" sz="2000" dirty="0">
                 <a:latin typeface="Times New Roman" panose="02020603050405020304" pitchFamily="18" charset="0"/>
                 <a:cs typeface="Times New Roman" panose="02020603050405020304" pitchFamily="18" charset="0"/>
               </a:rPr>
-              <a:t>To enable remote monitoring through cloud integration, allowing users to access system data and predictions from any </a:t>
-            </a:r>
-            <a:r>
-              <a:rPr lang="en-US" sz="2000" dirty="0" err="1">
-                <a:latin typeface="Times New Roman" panose="02020603050405020304" pitchFamily="18" charset="0"/>
-                <a:cs typeface="Times New Roman" panose="02020603050405020304" pitchFamily="18" charset="0"/>
-              </a:rPr>
-              <a:t>location.a</a:t>
-            </a:r>
+              <a:t>To enable remote monitoring and real-time accessibility through cloud integration, ensuring scalability and efficient handling of large data and multiple devices. </a:t>
+            </a:r>
+          </a:p>
+          <a:p>
+            <a:pPr marL="342900" indent="-342900" algn="just">
+              <a:buFont typeface="Wingdings" panose="05000000000000000000" pitchFamily="2" charset="2"/>
+              <a:buChar char="ü"/>
+            </a:pPr>
             <a:endParaRPr lang="en-US" sz="2000" dirty="0">
               <a:latin typeface="Times New Roman" panose="02020603050405020304" pitchFamily="18" charset="0"/>
               <a:cs typeface="Times New Roman" panose="02020603050405020304" pitchFamily="18" charset="0"/>
@@ -6913,7 +7005,7 @@
                 <a:latin typeface="Times New Roman" panose="02020603050405020304" pitchFamily="18" charset="0"/>
                 <a:cs typeface="Times New Roman" panose="02020603050405020304" pitchFamily="18" charset="0"/>
               </a:rPr>
-              <a:t>Applicable in manufacturing industries, where continuous machine operation and preventive maintenance are critical for productivity.</a:t>
+              <a:t>To support applications in industries like manufacturing, power plants, and heavy machinery, with IoT integration for smart sensors to improve maintenance efficiency and reduce operational risks. </a:t>
             </a:r>
           </a:p>
           <a:p>
@@ -6921,52 +7013,10 @@
               <a:buFont typeface="Wingdings" panose="05000000000000000000" pitchFamily="2" charset="2"/>
               <a:buChar char="ü"/>
             </a:pPr>
-            <a:r>
-              <a:rPr lang="en-US" sz="2000" dirty="0">
-                <a:latin typeface="Times New Roman" panose="02020603050405020304" pitchFamily="18" charset="0"/>
-                <a:cs typeface="Times New Roman" panose="02020603050405020304" pitchFamily="18" charset="0"/>
-              </a:rPr>
-              <a:t>Can be implemented in power plants and heavy machinery systems to monitor critical assets and reduce operational risks.</a:t>
-            </a:r>
-          </a:p>
-          <a:p>
-            <a:pPr marL="342900" indent="-342900" algn="just">
-              <a:buFont typeface="Wingdings" panose="05000000000000000000" pitchFamily="2" charset="2"/>
-              <a:buChar char="ü"/>
-            </a:pPr>
-            <a:r>
-              <a:rPr lang="en-US" sz="2000" dirty="0">
-                <a:latin typeface="Times New Roman" panose="02020603050405020304" pitchFamily="18" charset="0"/>
-                <a:cs typeface="Times New Roman" panose="02020603050405020304" pitchFamily="18" charset="0"/>
-              </a:rPr>
-              <a:t>Supports cloud deployment for scalability, enabling the system to handle increasing volumes of data and multiple equipment units efficiently.</a:t>
-            </a:r>
-          </a:p>
-          <a:p>
-            <a:pPr marL="342900" indent="-342900" algn="just">
-              <a:buFont typeface="Wingdings" panose="05000000000000000000" pitchFamily="2" charset="2"/>
-              <a:buChar char="ü"/>
-            </a:pPr>
-            <a:r>
-              <a:rPr lang="en-US" sz="2000" dirty="0">
-                <a:latin typeface="Times New Roman" panose="02020603050405020304" pitchFamily="18" charset="0"/>
-                <a:cs typeface="Times New Roman" panose="02020603050405020304" pitchFamily="18" charset="0"/>
-              </a:rPr>
-              <a:t>Enables real-time monitoring from anywhere, improving accessibility and faster decision-making for maintenance teams.</a:t>
-            </a:r>
-          </a:p>
-          <a:p>
-            <a:pPr marL="342900" indent="-342900" algn="just">
-              <a:buFont typeface="Wingdings" panose="05000000000000000000" pitchFamily="2" charset="2"/>
-              <a:buChar char="ü"/>
-            </a:pPr>
-            <a:r>
-              <a:rPr lang="en-US" sz="2000" dirty="0">
-                <a:latin typeface="Times New Roman" panose="02020603050405020304" pitchFamily="18" charset="0"/>
-                <a:cs typeface="Times New Roman" panose="02020603050405020304" pitchFamily="18" charset="0"/>
-              </a:rPr>
-              <a:t>Can be extended with IoT integration, allowing direct connection with smart sensors and industrial devices.</a:t>
-            </a:r>
+            <a:endParaRPr lang="en-US" sz="2000" dirty="0">
+              <a:latin typeface="Times New Roman" panose="02020603050405020304" pitchFamily="18" charset="0"/>
+              <a:cs typeface="Times New Roman" panose="02020603050405020304" pitchFamily="18" charset="0"/>
+            </a:endParaRPr>
           </a:p>
         </p:txBody>
       </p:sp>
